--- a/public/sample_uploads/portfolio_report_templates/ppt_placeholder_template.pptx
+++ b/public/sample_uploads/portfolio_report_templates/ppt_placeholder_template.pptx
@@ -32,6 +32,8 @@
         <a:xfrm>
           <a:off x="0" y="0"/>
           <a:ext cx="0" cy="0"/>
+          <a:chOff x="0" y="0"/>
+          <a:chExt cx="0" cy="0"/>
         </a:xfrm>
       </p:grpSpPr>
     </p:spTree>
@@ -59,10 +61,13 @@
         <a:xfrm>
           <a:off x="0" y="0"/>
           <a:ext cx="0" cy="0"/>
+          <a:chOff x="0" y="0"/>
+          <a:chExt cx="0" cy="0"/>
         </a:xfrm>
       </p:grpSpPr>
     </p:spTree>
   </p:cSld>
+  <p:clrMap bg1="lt1" tx1="dk1" bg2="lt2" tx2="dk2" accent1="accent1" accent2="accent2" accent3="accent3" accent4="accent4" accent5="accent5" accent6="accent6" hlink="hlink" folHlink="folHlink"/>
   <p:sldLayoutIdLst>
     <p:sldLayoutId id="2147483649" r:id="rId1"/>
   </p:sldLayoutIdLst>
@@ -95,6 +100,8 @@
         <a:xfrm>
           <a:off x="0" y="0"/>
           <a:ext cx="0" cy="0"/>
+          <a:chOff x="0" y="0"/>
+          <a:chExt cx="0" cy="0"/>
         </a:xfrm>
       </p:grpSpPr>
       <p:sp>
@@ -644,6 +651,8 @@
         <a:xfrm>
           <a:off x="0" y="0"/>
           <a:ext cx="0" cy="0"/>
+          <a:chOff x="0" y="0"/>
+          <a:chExt cx="0" cy="0"/>
         </a:xfrm>
       </p:grpSpPr>
       <p:sp>
@@ -1207,7 +1216,7 @@
                   <a:srgbClr val="94A3B8"/>
                 </a:solidFill>
               </a:rPr>
-              <a:t>29 May 2026</a:t>
+              <a:t>12 Jun 2026</a:t>
             </a:r>
           </a:p>
         </p:txBody>
@@ -1232,6 +1241,8 @@
         <a:xfrm>
           <a:off x="0" y="0"/>
           <a:ext cx="0" cy="0"/>
+          <a:chOff x="0" y="0"/>
+          <a:chExt cx="0" cy="0"/>
         </a:xfrm>
       </p:grpSpPr>
       <p:sp>
@@ -1885,7 +1896,7 @@
                   <a:srgbClr val="94A3B8"/>
                 </a:solidFill>
               </a:rPr>
-              <a:t>29 May 2026</a:t>
+              <a:t>12 Jun 2026</a:t>
             </a:r>
           </a:p>
         </p:txBody>
@@ -1910,6 +1921,8 @@
         <a:xfrm>
           <a:off x="0" y="0"/>
           <a:ext cx="0" cy="0"/>
+          <a:chOff x="0" y="0"/>
+          <a:chExt cx="0" cy="0"/>
         </a:xfrm>
       </p:grpSpPr>
       <p:sp>
@@ -2374,7 +2387,7 @@
                   <a:srgbClr val="94A3B8"/>
                 </a:solidFill>
               </a:rPr>
-              <a:t>29 May 2026</a:t>
+              <a:t>12 Jun 2026</a:t>
             </a:r>
           </a:p>
         </p:txBody>
@@ -2399,6 +2412,8 @@
         <a:xfrm>
           <a:off x="0" y="0"/>
           <a:ext cx="0" cy="0"/>
+          <a:chOff x="0" y="0"/>
+          <a:chExt cx="0" cy="0"/>
         </a:xfrm>
       </p:grpSpPr>
       <p:sp>
@@ -2863,7 +2878,7 @@
                   <a:srgbClr val="94A3B8"/>
                 </a:solidFill>
               </a:rPr>
-              <a:t>29 May 2026</a:t>
+              <a:t>12 Jun 2026</a:t>
             </a:r>
           </a:p>
         </p:txBody>
@@ -2888,6 +2903,8 @@
         <a:xfrm>
           <a:off x="0" y="0"/>
           <a:ext cx="0" cy="0"/>
+          <a:chOff x="0" y="0"/>
+          <a:chExt cx="0" cy="0"/>
         </a:xfrm>
       </p:grpSpPr>
       <p:sp>
@@ -3352,7 +3369,7 @@
                   <a:srgbClr val="94A3B8"/>
                 </a:solidFill>
               </a:rPr>
-              <a:t>29 May 2026</a:t>
+              <a:t>12 Jun 2026</a:t>
             </a:r>
           </a:p>
         </p:txBody>
@@ -3377,6 +3394,8 @@
         <a:xfrm>
           <a:off x="0" y="0"/>
           <a:ext cx="0" cy="0"/>
+          <a:chOff x="0" y="0"/>
+          <a:chExt cx="0" cy="0"/>
         </a:xfrm>
       </p:grpSpPr>
       <p:sp>
@@ -3841,7 +3860,7 @@
                   <a:srgbClr val="94A3B8"/>
                 </a:solidFill>
               </a:rPr>
-              <a:t>29 May 2026</a:t>
+              <a:t>12 Jun 2026</a:t>
             </a:r>
           </a:p>
         </p:txBody>
@@ -3866,6 +3885,8 @@
         <a:xfrm>
           <a:off x="0" y="0"/>
           <a:ext cx="0" cy="0"/>
+          <a:chOff x="0" y="0"/>
+          <a:chExt cx="0" cy="0"/>
         </a:xfrm>
       </p:grpSpPr>
       <p:sp>
@@ -4061,7 +4082,7 @@
                   <a:srgbClr val="047857"/>
                 </a:solidFill>
               </a:rPr>
-              <a:t>CapHive  ·  Generated 29 May 2026</a:t>
+              <a:t>CapHive  ·  Generated 12 Jun 2026</a:t>
             </a:r>
           </a:p>
         </p:txBody>
